--- a/slides/02-pgvector.pptx
+++ b/slides/02-pgvector.pptx
@@ -206,7 +206,7 @@
           <a:p>
             <a:fld id="{15DA2908-672F-DC48-8CAD-AEE711B947DA}" type="datetimeFigureOut">
               <a:rPr lang="en-US" smtClean="0"/>
-              <a:t>6/26/25</a:t>
+              <a:t>7/27/26</a:t>
             </a:fld>
             <a:endParaRPr lang="en-US"/>
           </a:p>
@@ -1373,6 +1373,13 @@
               </a:ext>
             </a:extLst>
           </p:spPr>
+          <p:txBody>
+            <a:bodyPr/>
+            <a:lstStyle/>
+            <a:p>
+              <a:endParaRPr lang="en-US"/>
+            </a:p>
+          </p:txBody>
         </p:sp>
         <p:sp>
           <p:nvSpPr>
@@ -1441,6 +1448,13 @@
               </a:ext>
             </a:extLst>
           </p:spPr>
+          <p:txBody>
+            <a:bodyPr/>
+            <a:lstStyle/>
+            <a:p>
+              <a:endParaRPr lang="en-US"/>
+            </a:p>
+          </p:txBody>
         </p:sp>
         <p:sp>
           <p:nvSpPr>
@@ -1514,6 +1528,13 @@
               </a:ext>
             </a:extLst>
           </p:spPr>
+          <p:txBody>
+            <a:bodyPr/>
+            <a:lstStyle/>
+            <a:p>
+              <a:endParaRPr lang="en-US"/>
+            </a:p>
+          </p:txBody>
         </p:sp>
         <p:sp>
           <p:nvSpPr>
@@ -1577,6 +1598,13 @@
               </a:ext>
             </a:extLst>
           </p:spPr>
+          <p:txBody>
+            <a:bodyPr/>
+            <a:lstStyle/>
+            <a:p>
+              <a:endParaRPr lang="en-US"/>
+            </a:p>
+          </p:txBody>
         </p:sp>
         <p:sp>
           <p:nvSpPr>
@@ -1630,6 +1658,13 @@
               </a:ext>
             </a:extLst>
           </p:spPr>
+          <p:txBody>
+            <a:bodyPr/>
+            <a:lstStyle/>
+            <a:p>
+              <a:endParaRPr lang="en-US"/>
+            </a:p>
+          </p:txBody>
         </p:sp>
         <p:sp>
           <p:nvSpPr>
@@ -1693,6 +1728,13 @@
               </a:ext>
             </a:extLst>
           </p:spPr>
+          <p:txBody>
+            <a:bodyPr/>
+            <a:lstStyle/>
+            <a:p>
+              <a:endParaRPr lang="en-US"/>
+            </a:p>
+          </p:txBody>
         </p:sp>
         <p:sp>
           <p:nvSpPr>
@@ -1751,6 +1793,13 @@
               </a:ext>
             </a:extLst>
           </p:spPr>
+          <p:txBody>
+            <a:bodyPr/>
+            <a:lstStyle/>
+            <a:p>
+              <a:endParaRPr lang="en-US"/>
+            </a:p>
+          </p:txBody>
         </p:sp>
         <p:sp>
           <p:nvSpPr>
@@ -1804,6 +1853,13 @@
               </a:ext>
             </a:extLst>
           </p:spPr>
+          <p:txBody>
+            <a:bodyPr/>
+            <a:lstStyle/>
+            <a:p>
+              <a:endParaRPr lang="en-US"/>
+            </a:p>
+          </p:txBody>
         </p:sp>
         <p:sp>
           <p:nvSpPr>
@@ -1862,6 +1918,13 @@
               </a:ext>
             </a:extLst>
           </p:spPr>
+          <p:txBody>
+            <a:bodyPr/>
+            <a:lstStyle/>
+            <a:p>
+              <a:endParaRPr lang="en-US"/>
+            </a:p>
+          </p:txBody>
         </p:sp>
         <p:sp>
           <p:nvSpPr>
@@ -1915,6 +1978,13 @@
               </a:ext>
             </a:extLst>
           </p:spPr>
+          <p:txBody>
+            <a:bodyPr/>
+            <a:lstStyle/>
+            <a:p>
+              <a:endParaRPr lang="en-US"/>
+            </a:p>
+          </p:txBody>
         </p:sp>
         <p:sp>
           <p:nvSpPr>
@@ -1973,6 +2043,13 @@
               </a:ext>
             </a:extLst>
           </p:spPr>
+          <p:txBody>
+            <a:bodyPr/>
+            <a:lstStyle/>
+            <a:p>
+              <a:endParaRPr lang="en-US"/>
+            </a:p>
+          </p:txBody>
         </p:sp>
         <p:sp>
           <p:nvSpPr>
@@ -2026,6 +2103,13 @@
               </a:ext>
             </a:extLst>
           </p:spPr>
+          <p:txBody>
+            <a:bodyPr/>
+            <a:lstStyle/>
+            <a:p>
+              <a:endParaRPr lang="en-US"/>
+            </a:p>
+          </p:txBody>
         </p:sp>
         <p:sp>
           <p:nvSpPr>
@@ -2084,6 +2168,13 @@
               </a:ext>
             </a:extLst>
           </p:spPr>
+          <p:txBody>
+            <a:bodyPr/>
+            <a:lstStyle/>
+            <a:p>
+              <a:endParaRPr lang="en-US"/>
+            </a:p>
+          </p:txBody>
         </p:sp>
         <p:sp>
           <p:nvSpPr>
@@ -2142,6 +2233,13 @@
               </a:ext>
             </a:extLst>
           </p:spPr>
+          <p:txBody>
+            <a:bodyPr/>
+            <a:lstStyle/>
+            <a:p>
+              <a:endParaRPr lang="en-US"/>
+            </a:p>
+          </p:txBody>
         </p:sp>
         <p:sp>
           <p:nvSpPr>
@@ -2200,6 +2298,13 @@
               </a:ext>
             </a:extLst>
           </p:spPr>
+          <p:txBody>
+            <a:bodyPr/>
+            <a:lstStyle/>
+            <a:p>
+              <a:endParaRPr lang="en-US"/>
+            </a:p>
+          </p:txBody>
         </p:sp>
         <p:sp>
           <p:nvSpPr>
@@ -2253,6 +2358,13 @@
               </a:ext>
             </a:extLst>
           </p:spPr>
+          <p:txBody>
+            <a:bodyPr/>
+            <a:lstStyle/>
+            <a:p>
+              <a:endParaRPr lang="en-US"/>
+            </a:p>
+          </p:txBody>
         </p:sp>
         <p:sp>
           <p:nvSpPr>
@@ -2306,6 +2418,13 @@
               </a:ext>
             </a:extLst>
           </p:spPr>
+          <p:txBody>
+            <a:bodyPr/>
+            <a:lstStyle/>
+            <a:p>
+              <a:endParaRPr lang="en-US"/>
+            </a:p>
+          </p:txBody>
         </p:sp>
         <p:sp>
           <p:nvSpPr>
@@ -2359,6 +2478,13 @@
               </a:ext>
             </a:extLst>
           </p:spPr>
+          <p:txBody>
+            <a:bodyPr/>
+            <a:lstStyle/>
+            <a:p>
+              <a:endParaRPr lang="en-US"/>
+            </a:p>
+          </p:txBody>
         </p:sp>
         <p:sp>
           <p:nvSpPr>
@@ -2412,6 +2538,13 @@
               </a:ext>
             </a:extLst>
           </p:spPr>
+          <p:txBody>
+            <a:bodyPr/>
+            <a:lstStyle/>
+            <a:p>
+              <a:endParaRPr lang="en-US"/>
+            </a:p>
+          </p:txBody>
         </p:sp>
       </p:grpSp>
       <p:grpSp>
@@ -2465,6 +2598,13 @@
               <a:schemeClr val="lt1"/>
             </a:fontRef>
           </p:style>
+          <p:txBody>
+            <a:bodyPr/>
+            <a:lstStyle/>
+            <a:p>
+              <a:endParaRPr lang="en-US"/>
+            </a:p>
+          </p:txBody>
         </p:sp>
         <p:sp>
           <p:nvSpPr>
@@ -2503,6 +2643,13 @@
               <a:schemeClr val="lt1"/>
             </a:fontRef>
           </p:style>
+          <p:txBody>
+            <a:bodyPr/>
+            <a:lstStyle/>
+            <a:p>
+              <a:endParaRPr lang="en-US"/>
+            </a:p>
+          </p:txBody>
         </p:sp>
         <p:sp>
           <p:nvSpPr>
@@ -2541,6 +2688,13 @@
               <a:schemeClr val="lt1"/>
             </a:fontRef>
           </p:style>
+          <p:txBody>
+            <a:bodyPr/>
+            <a:lstStyle/>
+            <a:p>
+              <a:endParaRPr lang="en-US"/>
+            </a:p>
+          </p:txBody>
         </p:sp>
       </p:grpSp>
       <p:sp>
@@ -2684,7 +2838,7 @@
           <a:p>
             <a:fld id="{F6CCBF3A-D7FB-4B97-8FD5-6FFB20CB1E84}" type="datetimeFigureOut">
               <a:rPr lang="en-US" smtClean="0"/>
-              <a:t>6/26/25</a:t>
+              <a:t>7/27/26</a:t>
             </a:fld>
             <a:endParaRPr lang="en-US"/>
           </a:p>
@@ -4143,7 +4297,7 @@
           <a:p>
             <a:fld id="{F6CCBF3A-D7FB-4B97-8FD5-6FFB20CB1E84}" type="datetimeFigureOut">
               <a:rPr lang="en-US" smtClean="0"/>
-              <a:t>6/26/25</a:t>
+              <a:t>7/27/26</a:t>
             </a:fld>
             <a:endParaRPr lang="en-US"/>
           </a:p>
@@ -5596,7 +5750,7 @@
           <a:p>
             <a:fld id="{F6CCBF3A-D7FB-4B97-8FD5-6FFB20CB1E84}" type="datetimeFigureOut">
               <a:rPr lang="en-US" smtClean="0"/>
-              <a:t>6/26/25</a:t>
+              <a:t>7/27/26</a:t>
             </a:fld>
             <a:endParaRPr lang="en-US"/>
           </a:p>
@@ -8155,7 +8309,7 @@
           <a:p>
             <a:fld id="{F6CCBF3A-D7FB-4B97-8FD5-6FFB20CB1E84}" type="datetimeFigureOut">
               <a:rPr lang="en-US" smtClean="0"/>
-              <a:t>6/26/25</a:t>
+              <a:t>7/27/26</a:t>
             </a:fld>
             <a:endParaRPr lang="en-US"/>
           </a:p>
@@ -9663,7 +9817,7 @@
           <a:p>
             <a:fld id="{F6CCBF3A-D7FB-4B97-8FD5-6FFB20CB1E84}" type="datetimeFigureOut">
               <a:rPr lang="en-US" smtClean="0"/>
-              <a:t>6/26/25</a:t>
+              <a:t>7/27/26</a:t>
             </a:fld>
             <a:endParaRPr lang="en-US"/>
           </a:p>
@@ -11184,7 +11338,7 @@
           <a:p>
             <a:fld id="{F6CCBF3A-D7FB-4B97-8FD5-6FFB20CB1E84}" type="datetimeFigureOut">
               <a:rPr lang="en-US" smtClean="0"/>
-              <a:t>6/26/25</a:t>
+              <a:t>7/27/26</a:t>
             </a:fld>
             <a:endParaRPr lang="en-US"/>
           </a:p>
@@ -12849,7 +13003,7 @@
           <a:p>
             <a:fld id="{F6CCBF3A-D7FB-4B97-8FD5-6FFB20CB1E84}" type="datetimeFigureOut">
               <a:rPr lang="en-US" smtClean="0"/>
-              <a:t>6/26/25</a:t>
+              <a:t>7/27/26</a:t>
             </a:fld>
             <a:endParaRPr lang="en-US"/>
           </a:p>
@@ -14247,7 +14401,7 @@
           <a:p>
             <a:fld id="{F6CCBF3A-D7FB-4B97-8FD5-6FFB20CB1E84}" type="datetimeFigureOut">
               <a:rPr lang="en-US" smtClean="0"/>
-              <a:t>6/26/25</a:t>
+              <a:t>7/27/26</a:t>
             </a:fld>
             <a:endParaRPr lang="en-US"/>
           </a:p>
@@ -14347,7 +14501,7 @@
           <a:p>
             <a:fld id="{F6CCBF3A-D7FB-4B97-8FD5-6FFB20CB1E84}" type="datetimeFigureOut">
               <a:rPr lang="en-US" smtClean="0"/>
-              <a:t>6/26/25</a:t>
+              <a:t>7/27/26</a:t>
             </a:fld>
             <a:endParaRPr lang="en-US"/>
           </a:p>
@@ -15873,7 +16027,7 @@
           <a:p>
             <a:fld id="{F6CCBF3A-D7FB-4B97-8FD5-6FFB20CB1E84}" type="datetimeFigureOut">
               <a:rPr lang="en-US" smtClean="0"/>
-              <a:t>6/26/25</a:t>
+              <a:t>7/27/26</a:t>
             </a:fld>
             <a:endParaRPr lang="en-US"/>
           </a:p>
@@ -17409,7 +17563,7 @@
           <a:p>
             <a:fld id="{F6CCBF3A-D7FB-4B97-8FD5-6FFB20CB1E84}" type="datetimeFigureOut">
               <a:rPr lang="en-US" smtClean="0"/>
-              <a:t>6/26/25</a:t>
+              <a:t>7/27/26</a:t>
             </a:fld>
             <a:endParaRPr lang="en-US"/>
           </a:p>
@@ -17632,7 +17786,7 @@
           <a:p>
             <a:fld id="{F6CCBF3A-D7FB-4B97-8FD5-6FFB20CB1E84}" type="datetimeFigureOut">
               <a:rPr lang="en-US" smtClean="0"/>
-              <a:t>6/26/25</a:t>
+              <a:t>7/27/26</a:t>
             </a:fld>
             <a:endParaRPr lang="en-US"/>
           </a:p>
